--- a/sessions_in_Abu_Dhabi/session_9.pptx
+++ b/sessions_in_Abu_Dhabi/session_9.pptx
@@ -3226,7 +3226,7 @@
       </p:sp>
       <p:pic>
         <p:nvPicPr>
-          <p:cNvPr descr="session_9_files/figure-pptx/unnamed-chunk-6-1.png" id="0" name="Picture 1"/>
+          <p:cNvPr descr="session_9_files/figure-pptx/unnamed-chunk-7-1.png" id="0" name="Picture 1"/>
           <p:cNvPicPr>
             <a:picLocks noGrp="1" noChangeAspect="1"/>
           </p:cNvPicPr>
@@ -3358,7 +3358,7 @@
       </p:sp>
       <p:pic>
         <p:nvPicPr>
-          <p:cNvPr descr="session_9_files/figure-pptx/unnamed-chunk-7-1.png" id="0" name="Picture 1"/>
+          <p:cNvPr descr="session_9_files/figure-pptx/unnamed-chunk-8-1.png" id="0" name="Picture 1"/>
           <p:cNvPicPr>
             <a:picLocks noGrp="1" noChangeAspect="1"/>
           </p:cNvPicPr>
@@ -5663,7 +5663,7 @@
       </p:sp>
       <p:pic>
         <p:nvPicPr>
-          <p:cNvPr descr="session_9_files/figure-pptx/unnamed-chunk-9-1.png" id="0" name="Picture 1"/>
+          <p:cNvPr descr="session_9_files/figure-pptx/unnamed-chunk-10-1.png" id="0" name="Picture 1"/>
           <p:cNvPicPr>
             <a:picLocks noGrp="1" noChangeAspect="1"/>
           </p:cNvPicPr>
@@ -9440,7 +9440,7 @@
             <a:pPr lvl="0"/>
             <a:r>
               <a:rPr b="1"/>
-              <a:t>Identification</a:t>
+              <a:t>Assumption</a:t>
             </a:r>
             <a:r>
               <a:rPr/>
@@ -9456,6 +9456,17 @@
             <a:r>
               <a:rPr/>
               <a:t>: Widely used for policy evaluation</a:t>
+            </a:r>
+          </a:p>
+          <a:p>
+            <a:pPr lvl="0"/>
+            <a:r>
+              <a:rPr b="1"/>
+              <a:t>Types</a:t>
+            </a:r>
+            <a:r>
+              <a:rPr/>
+              <a:t>: Two-way fixed effects, staggered adoption, triple differences, matched DID, etc.</a:t>
             </a:r>
           </a:p>
         </p:txBody>
@@ -9745,6 +9756,55 @@
                       </p:childTnLst>
                     </p:cTn>
                   </p:par>
+                  <p:par>
+                    <p:cTn id="23" fill="hold">
+                      <p:stCondLst>
+                        <p:cond delay="indefinite"/>
+                      </p:stCondLst>
+                      <p:childTnLst>
+                        <p:par>
+                          <p:cTn id="24" fill="hold">
+                            <p:stCondLst>
+                              <p:cond delay="0"/>
+                            </p:stCondLst>
+                            <p:childTnLst>
+                              <p:par>
+                                <p:cTn id="25" presetID="1" presetClass="entr" presetSubtype="0" fill="hold" grpId="0" nodeType="clickEffect">
+                                  <p:stCondLst>
+                                    <p:cond delay="0"/>
+                                  </p:stCondLst>
+                                  <p:childTnLst>
+                                    <p:set>
+                                      <p:cBhvr>
+                                        <p:cTn id="26" dur="1" fill="hold">
+                                          <p:stCondLst>
+                                            <p:cond delay="0"/>
+                                          </p:stCondLst>
+                                        </p:cTn>
+                                        <p:tgtEl>
+                                          <p:spTgt spid="3">
+                                            <p:txEl>
+                                              <p:pRg st="5" end="5"/>
+                                            </p:txEl>
+                                          </p:spTgt>
+                                        </p:tgtEl>
+                                        <p:attrNameLst>
+                                          <p:attrName>style.visibility</p:attrName>
+                                        </p:attrNameLst>
+                                      </p:cBhvr>
+                                      <p:to>
+                                        <p:strVal val="visible"/>
+                                      </p:to>
+                                    </p:set>
+                                  </p:childTnLst>
+                                </p:cTn>
+                              </p:par>
+                            </p:childTnLst>
+                          </p:cTn>
+                        </p:par>
+                      </p:childTnLst>
+                    </p:cTn>
+                  </p:par>
                 </p:childTnLst>
               </p:cTn>
               <p:prevCondLst>
@@ -9839,7 +9899,7 @@
             </a:r>
             <a:r>
               <a:rPr/>
-              <a:t>: Should the Program be scaled up nationally?</a:t>
+              <a:t>: Should the program be scaled up nationally?</a:t>
             </a:r>
           </a:p>
           <a:p>
@@ -9852,7 +9912,7 @@
             </a:r>
             <a:r>
               <a:rPr/>
-              <a:t>: Program must reduce industries expenditures by at least $10,000.</a:t>
+              <a:t>: Program must reduce businesses’ expenditures by at least 1,000 AED.</a:t>
             </a:r>
           </a:p>
           <a:p>
@@ -9872,14 +9932,14 @@
             <a:pPr lvl="0"/>
             <a:r>
               <a:rPr/>
-              <a:t>Effect: $-8163 (95% CI: [ $-7534, $-8792])</a:t>
+              <a:t>Effect: -816 AED (95% CI: [-753, -879])</a:t>
             </a:r>
           </a:p>
           <a:p>
             <a:pPr lvl="0"/>
             <a:r>
               <a:rPr/>
-              <a:t>Point estimate below the $10,000 threshold</a:t>
+              <a:t>Point estimate below the 1,000 AED threshold</a:t>
             </a:r>
           </a:p>
           <a:p>
@@ -9899,7 +9959,7 @@
             </a:r>
             <a:r>
               <a:rPr/>
-              <a:t>: Based on the DiD estimate, Program should not be scaled up nationally.</a:t>
+              <a:t>: Based on the DiD estimate, the program should not be scaled up nationally.</a:t>
             </a:r>
           </a:p>
         </p:txBody>
@@ -10178,7 +10238,7 @@
             </a:pPr>
             <a:r>
               <a:rPr/>
-              <a:t>The Program reduced waste expenditures by $8163 according to DiD</a:t>
+              <a:t>The Program reduced waste expenditures by 816 according to DiD</a:t>
             </a:r>
           </a:p>
           <a:p>
@@ -10187,7 +10247,7 @@
             </a:pPr>
             <a:r>
               <a:rPr/>
-              <a:t>This estimate is below the $10,000 threshold for scaling up nationally</a:t>
+              <a:t>This estimate is below the 1,000 AED threshold for scaling up nationally</a:t>
             </a:r>
           </a:p>
         </p:txBody>
@@ -11435,21 +11495,21 @@
             <a:pPr lvl="0"/>
             <a:r>
               <a:rPr/>
-              <a:t>Both groups are in treatment zones (where Program was offered)</a:t>
+              <a:t>Both groups are in treatment zones (where the program was offered)</a:t>
             </a:r>
           </a:p>
           <a:p>
             <a:pPr lvl="0"/>
             <a:r>
               <a:rPr/>
-              <a:t>We have data for two periods: before and after Program implementation</a:t>
+              <a:t>We have data for two periods: before and after the program implementation</a:t>
             </a:r>
           </a:p>
           <a:p>
             <a:pPr lvl="0"/>
             <a:r>
               <a:rPr/>
-              <a:t>DiD can help address selection bias if trends would be parallel without Program</a:t>
+              <a:t>DiD can help address selection bias if trends would be parallel without the program</a:t>
             </a:r>
           </a:p>
         </p:txBody>
@@ -12706,8 +12766,8 @@
                     <m:d>
                       <m:dPr>
                         <m:begChr m:val="("/>
+                        <m:sepChr m:val=""/>
                         <m:endChr m:val=")"/>
-                        <m:sepChr m:val=""/>
                         <m:grow/>
                       </m:dPr>
                       <m:e>
@@ -12940,7 +13000,7 @@
                       </a:pPr>
                       <a:r>
                         <a:rPr/>
-                        <a:t>Not Enrolled</a:t>
+                        <a:t>Not Offered</a:t>
                       </a:r>
                     </a:p>
                   </a:txBody>
@@ -12956,7 +13016,7 @@
                       </a:pPr>
                       <a:r>
                         <a:rPr/>
-                        <a:t>Enrolled</a:t>
+                        <a:t>Offered</a:t>
                       </a:r>
                     </a:p>
                   </a:txBody>
@@ -13470,7 +13530,7 @@
             </a:pPr>
             <a:r>
               <a:rPr/>
-              <a:t>DiD Results for Program</a:t>
+              <a:t>DiD Results for the Program</a:t>
             </a:r>
           </a:p>
         </p:txBody>
@@ -13570,7 +13630,7 @@
                       </a:pPr>
                       <a:r>
                         <a:rPr/>
-                        <a:t>20791.494***</a:t>
+                        <a:t>2079.149***</a:t>
                       </a:r>
                     </a:p>
                   </a:txBody>
@@ -13585,7 +13645,7 @@
                       </a:pPr>
                       <a:r>
                         <a:rPr/>
-                        <a:t>27500.322***</a:t>
+                        <a:t>2750.032***</a:t>
                       </a:r>
                     </a:p>
                   </a:txBody>
@@ -13611,7 +13671,7 @@
                       </a:pPr>
                       <a:r>
                         <a:rPr/>
-                        <a:t>(173.606)</a:t>
+                        <a:t>(17.361)</a:t>
                       </a:r>
                     </a:p>
                   </a:txBody>
@@ -13626,7 +13686,7 @@
                       </a:pPr>
                       <a:r>
                         <a:rPr/>
-                        <a:t>(467.392)</a:t>
+                        <a:t>(46.739)</a:t>
                       </a:r>
                     </a:p>
                   </a:txBody>
@@ -13658,7 +13718,7 @@
                       </a:pPr>
                       <a:r>
                         <a:rPr/>
-                        <a:t>1513.416***</a:t>
+                        <a:t>151.342***</a:t>
                       </a:r>
                     </a:p>
                   </a:txBody>
@@ -13673,7 +13733,7 @@
                       </a:pPr>
                       <a:r>
                         <a:rPr/>
-                        <a:t>1449.254***</a:t>
+                        <a:t>144.925***</a:t>
                       </a:r>
                     </a:p>
                   </a:txBody>
@@ -13699,7 +13759,7 @@
                       </a:pPr>
                       <a:r>
                         <a:rPr/>
-                        <a:t>(359.640)</a:t>
+                        <a:t>(35.964)</a:t>
                       </a:r>
                     </a:p>
                   </a:txBody>
@@ -13714,7 +13774,7 @@
                       </a:pPr>
                       <a:r>
                         <a:rPr/>
-                        <a:t>(358.257)</a:t>
+                        <a:t>(35.826)</a:t>
                       </a:r>
                     </a:p>
                   </a:txBody>
@@ -13746,7 +13806,7 @@
                       </a:pPr>
                       <a:r>
                         <a:rPr/>
-                        <a:t>−6301.800***</a:t>
+                        <a:t>−630.180***</a:t>
                       </a:r>
                     </a:p>
                   </a:txBody>
@@ -13761,7 +13821,7 @@
                       </a:pPr>
                       <a:r>
                         <a:rPr/>
-                        <a:t>−1572.721***</a:t>
+                        <a:t>−157.272***</a:t>
                       </a:r>
                     </a:p>
                   </a:txBody>
@@ -13787,7 +13847,7 @@
                       </a:pPr>
                       <a:r>
                         <a:rPr/>
-                        <a:t>(194.487)</a:t>
+                        <a:t>(19.449)</a:t>
                       </a:r>
                     </a:p>
                   </a:txBody>
@@ -13802,7 +13862,7 @@
                       </a:pPr>
                       <a:r>
                         <a:rPr/>
-                        <a:t>(129.370)</a:t>
+                        <a:t>(12.937)</a:t>
                       </a:r>
                     </a:p>
                   </a:txBody>
@@ -13834,7 +13894,7 @@
                       </a:pPr>
                       <a:r>
                         <a:rPr/>
-                        <a:t>−8162.931***</a:t>
+                        <a:t>−816.293***</a:t>
                       </a:r>
                     </a:p>
                   </a:txBody>
@@ -13849,7 +13909,7 @@
                       </a:pPr>
                       <a:r>
                         <a:rPr/>
-                        <a:t>−8161.809***</a:t>
+                        <a:t>−816.181***</a:t>
                       </a:r>
                     </a:p>
                   </a:txBody>
@@ -13875,7 +13935,7 @@
                       </a:pPr>
                       <a:r>
                         <a:rPr/>
-                        <a:t>(320.819)</a:t>
+                        <a:t>(32.082)</a:t>
                       </a:r>
                     </a:p>
                   </a:txBody>
@@ -13890,7 +13950,7 @@
                       </a:pPr>
                       <a:r>
                         <a:rPr/>
-                        <a:t>(321.221)</a:t>
+                        <a:t>(32.122)</a:t>
                       </a:r>
                     </a:p>
                   </a:txBody>
@@ -13931,7 +13991,7 @@
                       </a:pPr>
                       <a:r>
                         <a:rPr/>
-                        <a:t>78.450***</a:t>
+                        <a:t>7.845***</a:t>
                       </a:r>
                     </a:p>
                   </a:txBody>
@@ -13966,7 +14026,7 @@
                       </a:pPr>
                       <a:r>
                         <a:rPr/>
-                        <a:t>(11.071)</a:t>
+                        <a:t>(1.107)</a:t>
                       </a:r>
                     </a:p>
                   </a:txBody>
@@ -14007,7 +14067,7 @@
                       </a:pPr>
                       <a:r>
                         <a:rPr/>
-                        <a:t>−15.593</a:t>
+                        <a:t>−1.559</a:t>
                       </a:r>
                     </a:p>
                   </a:txBody>
@@ -14042,7 +14102,7 @@
                       </a:pPr>
                       <a:r>
                         <a:rPr/>
-                        <a:t>(12.899)</a:t>
+                        <a:t>(1.290)</a:t>
                       </a:r>
                     </a:p>
                   </a:txBody>
@@ -14083,7 +14143,7 @@
                       </a:pPr>
                       <a:r>
                         <a:rPr/>
-                        <a:t>1050.098**</a:t>
+                        <a:t>105.010**</a:t>
                       </a:r>
                     </a:p>
                   </a:txBody>
@@ -14118,7 +14178,7 @@
                       </a:pPr>
                       <a:r>
                         <a:rPr/>
-                        <a:t>(320.100)</a:t>
+                        <a:t>(32.010)</a:t>
                       </a:r>
                     </a:p>
                   </a:txBody>
@@ -14159,7 +14219,7 @@
                       </a:pPr>
                       <a:r>
                         <a:rPr/>
-                        <a:t>−2234.127***</a:t>
+                        <a:t>−223.413***</a:t>
                       </a:r>
                     </a:p>
                   </a:txBody>
@@ -14194,7 +14254,7 @@
                       </a:pPr>
                       <a:r>
                         <a:rPr/>
-                        <a:t>(234.660)</a:t>
+                        <a:t>(23.466)</a:t>
                       </a:r>
                     </a:p>
                   </a:txBody>
@@ -14235,7 +14295,7 @@
                       </a:pPr>
                       <a:r>
                         <a:rPr/>
-                        <a:t>−1985.216***</a:t>
+                        <a:t>−198.522***</a:t>
                       </a:r>
                     </a:p>
                   </a:txBody>
@@ -14270,7 +14330,7 @@
                       </a:pPr>
                       <a:r>
                         <a:rPr/>
-                        <a:t>(39.070)</a:t>
+                        <a:t>(3.907)</a:t>
                       </a:r>
                     </a:p>
                   </a:txBody>
@@ -14311,7 +14371,7 @@
                       </a:pPr>
                       <a:r>
                         <a:rPr/>
-                        <a:t>−2333.287***</a:t>
+                        <a:t>−233.329***</a:t>
                       </a:r>
                     </a:p>
                   </a:txBody>
@@ -14346,7 +14406,7 @@
                       </a:pPr>
                       <a:r>
                         <a:rPr/>
-                        <a:t>(154.610)</a:t>
+                        <a:t>(15.461)</a:t>
                       </a:r>
                     </a:p>
                   </a:txBody>
@@ -14387,7 +14447,7 @@
                       </a:pPr>
                       <a:r>
                         <a:rPr/>
-                        <a:t>96.680**</a:t>
+                        <a:t>9.668**</a:t>
                       </a:r>
                     </a:p>
                   </a:txBody>
@@ -14422,7 +14482,7 @@
                       </a:pPr>
                       <a:r>
                         <a:rPr/>
-                        <a:t>(29.450)</a:t>
+                        <a:t>(2.945)</a:t>
                       </a:r>
                     </a:p>
                   </a:txBody>
@@ -14463,7 +14523,7 @@
                       </a:pPr>
                       <a:r>
                         <a:rPr/>
-                        <a:t>−2.503</a:t>
+                        <a:t>−0.250</a:t>
                       </a:r>
                     </a:p>
                   </a:txBody>
@@ -14498,7 +14558,7 @@
                       </a:pPr>
                       <a:r>
                         <a:rPr/>
-                        <a:t>(3.113)</a:t>
+                        <a:t>(0.311)</a:t>
                       </a:r>
                     </a:p>
                   </a:txBody>
@@ -14715,14 +14775,14 @@
             <a:pPr lvl="0"/>
             <a:r>
               <a:rPr/>
-              <a:t>Initial difference: Enrolled industries spent $6301.8 less at baseline</a:t>
+              <a:t>Initial difference: Enrolled industries spent $630.2 less at baseline</a:t>
             </a:r>
           </a:p>
           <a:p>
             <a:pPr lvl="0"/>
             <a:r>
               <a:rPr/>
-              <a:t>Time trend: Non-enrolled industries increased spending by $1513.4</a:t>
+              <a:t>Time trend: Non-enrolled industries increased spending by $151.3</a:t>
             </a:r>
           </a:p>
           <a:p>
@@ -14733,14 +14793,14 @@
             </a:r>
             <a:r>
               <a:rPr/>
-              <a:t>: Program reduced expenditures by $8162.9</a:t>
+              <a:t>: Program reduced expenditures by $816.3</a:t>
             </a:r>
           </a:p>
           <a:p>
             <a:pPr lvl="0"/>
             <a:r>
               <a:rPr/>
-              <a:t>Result is statistically significant but below the $10,000 threshold</a:t>
+              <a:t>Result is statistically significant but below the 1,000 AED threshold</a:t>
             </a:r>
           </a:p>
         </p:txBody>
